--- a/hacking-and-securing-llms.pptx
+++ b/hacking-and-securing-llms.pptx
@@ -15,8 +15,10 @@
     <p:sldId id="263" r:id="rId9"/>
     <p:sldId id="264" r:id="rId10"/>
     <p:sldId id="265" r:id="rId11"/>
-    <p:sldId id="266" r:id="rId12"/>
-    <p:sldId id="267" r:id="rId13"/>
+    <p:sldId id="273" r:id="rId12"/>
+    <p:sldId id="270" r:id="rId13"/>
+    <p:sldId id="272" r:id="rId14"/>
+    <p:sldId id="274" r:id="rId15"/>
   </p:sldIdLst>
   <p:sldSz cx="12192000" cy="6858000"/>
   <p:notesSz cx="6858000" cy="9144000"/>
@@ -313,7 +315,7 @@
           <a:p>
             <a:fld id="{5BCAD085-E8A6-8845-BD4E-CB4CCA059FC4}" type="datetimeFigureOut">
               <a:rPr lang="en-US" smtClean="0"/>
-              <a:t>4/1/26</a:t>
+              <a:t>4/17/26</a:t>
             </a:fld>
             <a:endParaRPr lang="en-US"/>
           </a:p>
@@ -481,7 +483,7 @@
           <a:p>
             <a:fld id="{5BCAD085-E8A6-8845-BD4E-CB4CCA059FC4}" type="datetimeFigureOut">
               <a:rPr lang="en-US" smtClean="0"/>
-              <a:t>4/1/26</a:t>
+              <a:t>4/17/26</a:t>
             </a:fld>
             <a:endParaRPr lang="en-US"/>
           </a:p>
@@ -659,7 +661,7 @@
           <a:p>
             <a:fld id="{5BCAD085-E8A6-8845-BD4E-CB4CCA059FC4}" type="datetimeFigureOut">
               <a:rPr lang="en-US" smtClean="0"/>
-              <a:t>4/1/26</a:t>
+              <a:t>4/17/26</a:t>
             </a:fld>
             <a:endParaRPr lang="en-US"/>
           </a:p>
@@ -827,7 +829,7 @@
           <a:p>
             <a:fld id="{5BCAD085-E8A6-8845-BD4E-CB4CCA059FC4}" type="datetimeFigureOut">
               <a:rPr lang="en-US" smtClean="0"/>
-              <a:t>4/1/26</a:t>
+              <a:t>4/17/26</a:t>
             </a:fld>
             <a:endParaRPr lang="en-US"/>
           </a:p>
@@ -1072,7 +1074,7 @@
           <a:p>
             <a:fld id="{5BCAD085-E8A6-8845-BD4E-CB4CCA059FC4}" type="datetimeFigureOut">
               <a:rPr lang="en-US" smtClean="0"/>
-              <a:t>4/1/26</a:t>
+              <a:t>4/17/26</a:t>
             </a:fld>
             <a:endParaRPr lang="en-US"/>
           </a:p>
@@ -1357,7 +1359,7 @@
           <a:p>
             <a:fld id="{5BCAD085-E8A6-8845-BD4E-CB4CCA059FC4}" type="datetimeFigureOut">
               <a:rPr lang="en-US" smtClean="0"/>
-              <a:t>4/1/26</a:t>
+              <a:t>4/17/26</a:t>
             </a:fld>
             <a:endParaRPr lang="en-US"/>
           </a:p>
@@ -1776,7 +1778,7 @@
           <a:p>
             <a:fld id="{5BCAD085-E8A6-8845-BD4E-CB4CCA059FC4}" type="datetimeFigureOut">
               <a:rPr lang="en-US" smtClean="0"/>
-              <a:t>4/1/26</a:t>
+              <a:t>4/17/26</a:t>
             </a:fld>
             <a:endParaRPr lang="en-US"/>
           </a:p>
@@ -1893,7 +1895,7 @@
           <a:p>
             <a:fld id="{5BCAD085-E8A6-8845-BD4E-CB4CCA059FC4}" type="datetimeFigureOut">
               <a:rPr lang="en-US" smtClean="0"/>
-              <a:t>4/1/26</a:t>
+              <a:t>4/17/26</a:t>
             </a:fld>
             <a:endParaRPr lang="en-US"/>
           </a:p>
@@ -1988,7 +1990,7 @@
           <a:p>
             <a:fld id="{5BCAD085-E8A6-8845-BD4E-CB4CCA059FC4}" type="datetimeFigureOut">
               <a:rPr lang="en-US" smtClean="0"/>
-              <a:t>4/1/26</a:t>
+              <a:t>4/17/26</a:t>
             </a:fld>
             <a:endParaRPr lang="en-US"/>
           </a:p>
@@ -2263,7 +2265,7 @@
           <a:p>
             <a:fld id="{5BCAD085-E8A6-8845-BD4E-CB4CCA059FC4}" type="datetimeFigureOut">
               <a:rPr lang="en-US" smtClean="0"/>
-              <a:t>4/1/26</a:t>
+              <a:t>4/17/26</a:t>
             </a:fld>
             <a:endParaRPr lang="en-US"/>
           </a:p>
@@ -2515,7 +2517,7 @@
           <a:p>
             <a:fld id="{5BCAD085-E8A6-8845-BD4E-CB4CCA059FC4}" type="datetimeFigureOut">
               <a:rPr lang="en-US" smtClean="0"/>
-              <a:t>4/1/26</a:t>
+              <a:t>4/17/26</a:t>
             </a:fld>
             <a:endParaRPr lang="en-US"/>
           </a:p>
@@ -2726,7 +2728,7 @@
           <a:p>
             <a:fld id="{5BCAD085-E8A6-8845-BD4E-CB4CCA059FC4}" type="datetimeFigureOut">
               <a:rPr lang="en-US" smtClean="0"/>
-              <a:t>4/1/26</a:t>
+              <a:t>4/17/26</a:t>
             </a:fld>
             <a:endParaRPr lang="en-US"/>
           </a:p>
@@ -5579,7 +5581,7 @@
         <p:spPr>
           <a:xfrm>
             <a:off x="10515600" y="6400800"/>
-            <a:ext cx="1371600" cy="365760"/>
+            <a:ext cx="1371600" cy="261610"/>
           </a:xfrm>
           <a:prstGeom prst="rect">
             <a:avLst/>
@@ -5599,20 +5601,25 @@
               <a:spcAft>
                 <a:spcPts val="600"/>
               </a:spcAft>
-              <a:defRPr sz="1100" b="0">
+            </a:pPr>
+            <a:r>
+              <a:rPr lang="en-US" sz="1100" b="0" dirty="0">
                 <a:solidFill>
                   <a:srgbClr val="888888"/>
                 </a:solidFill>
                 <a:latin typeface="Consolas"/>
-              </a:defRPr>
-            </a:pPr>
-            <a:r>
-              <a:t>11 / 12</a:t>
+              </a:rPr>
+              <a:t>11 / 14</a:t>
             </a:r>
           </a:p>
         </p:txBody>
       </p:sp>
     </p:spTree>
+    <p:extLst>
+      <p:ext uri="{BB962C8B-B14F-4D97-AF65-F5344CB8AC3E}">
+        <p14:creationId xmlns:p14="http://schemas.microsoft.com/office/powerpoint/2010/main" val="3777866600"/>
+      </p:ext>
+    </p:extLst>
   </p:cSld>
   <p:clrMapOvr>
     <a:masterClrMapping/>
@@ -5621,6 +5628,2211 @@
 </file>
 
 <file path=ppt/slides/slide12.xml><?xml version="1.0" encoding="utf-8"?>
+<p:sld xmlns:a="http://schemas.openxmlformats.org/drawingml/2006/main" xmlns:r="http://schemas.openxmlformats.org/officeDocument/2006/relationships" xmlns:p="http://schemas.openxmlformats.org/presentationml/2006/main">
+  <p:cSld>
+    <p:bg>
+      <p:bgPr>
+        <a:solidFill>
+          <a:srgbClr val="121212">
+            <a:alpha val="100000"/>
+          </a:srgbClr>
+        </a:solidFill>
+        <a:effectLst/>
+      </p:bgPr>
+    </p:bg>
+    <p:spTree>
+      <p:nvGrpSpPr>
+        <p:cNvPr id="1" name=""/>
+        <p:cNvGrpSpPr/>
+        <p:nvPr/>
+      </p:nvGrpSpPr>
+      <p:grpSpPr>
+        <a:xfrm>
+          <a:off x="0" y="0"/>
+          <a:ext cx="0" cy="0"/>
+          <a:chOff x="0" y="0"/>
+          <a:chExt cx="0" cy="0"/>
+        </a:xfrm>
+      </p:grpSpPr>
+      <p:sp>
+        <p:nvSpPr>
+          <p:cNvPr id="2" name="Title"/>
+          <p:cNvSpPr/>
+          <p:nvPr/>
+        </p:nvSpPr>
+        <p:spPr>
+          <a:xfrm>
+            <a:off x="457200" y="279400"/>
+            <a:ext cx="11277600" cy="635000"/>
+          </a:xfrm>
+          <a:prstGeom prst="rect">
+            <a:avLst/>
+          </a:prstGeom>
+          <a:noFill/>
+          <a:ln>
+            <a:noFill/>
+          </a:ln>
+        </p:spPr>
+        <p:txBody>
+          <a:bodyPr wrap="square" lIns="0" tIns="0" rIns="0" bIns="0" anchor="t"/>
+          <a:lstStyle/>
+          <a:p>
+            <a:pPr algn="l">
+              <a:spcBef>
+                <a:spcPts val="0"/>
+              </a:spcBef>
+              <a:spcAft>
+                <a:spcPts val="600"/>
+              </a:spcAft>
+            </a:pPr>
+            <a:r>
+              <a:rPr lang="en-US" sz="1400" b="0" dirty="0">
+                <a:solidFill>
+                  <a:srgbClr val="BB86FC"/>
+                </a:solidFill>
+                <a:latin typeface="Consolas"/>
+              </a:rPr>
+              <a:t>// DEFENDING WITH AZURE AI FOUNDRY</a:t>
+            </a:r>
+          </a:p>
+        </p:txBody>
+      </p:sp>
+      <p:sp>
+        <p:nvSpPr>
+          <p:cNvPr id="3" name="Divider"/>
+          <p:cNvSpPr/>
+          <p:nvPr/>
+        </p:nvSpPr>
+        <p:spPr>
+          <a:xfrm>
+            <a:off x="457200" y="825500"/>
+            <a:ext cx="11277600" cy="25400"/>
+          </a:xfrm>
+          <a:prstGeom prst="rect">
+            <a:avLst/>
+          </a:prstGeom>
+          <a:solidFill>
+            <a:srgbClr val="BB86FC"/>
+          </a:solidFill>
+          <a:ln>
+            <a:noFill/>
+          </a:ln>
+        </p:spPr>
+        <p:txBody>
+          <a:bodyPr wrap="square" lIns="0" tIns="0" rIns="0" bIns="0" anchor="t"/>
+          <a:lstStyle/>
+          <a:p>
+            <a:endParaRPr lang="en-US"/>
+          </a:p>
+        </p:txBody>
+      </p:sp>
+      <p:sp>
+        <p:nvSpPr>
+          <p:cNvPr id="4" name="SectionLeft"/>
+          <p:cNvSpPr/>
+          <p:nvPr/>
+        </p:nvSpPr>
+        <p:spPr>
+          <a:xfrm>
+            <a:off x="457200" y="1054100"/>
+            <a:ext cx="5486400" cy="368300"/>
+          </a:xfrm>
+          <a:prstGeom prst="rect">
+            <a:avLst/>
+          </a:prstGeom>
+          <a:noFill/>
+          <a:ln>
+            <a:noFill/>
+          </a:ln>
+        </p:spPr>
+        <p:txBody>
+          <a:bodyPr wrap="square" lIns="0" tIns="0" rIns="0" bIns="0" anchor="t"/>
+          <a:lstStyle/>
+          <a:p>
+            <a:pPr algn="l">
+              <a:spcBef>
+                <a:spcPts val="0"/>
+              </a:spcBef>
+              <a:spcAft>
+                <a:spcPts val="600"/>
+              </a:spcAft>
+            </a:pPr>
+            <a:r>
+              <a:rPr lang="en-US" sz="1400" b="1" dirty="0">
+                <a:solidFill>
+                  <a:srgbClr val="BB86FC"/>
+                </a:solidFill>
+                <a:latin typeface="Consolas"/>
+              </a:rPr>
+              <a:t>BUILT-IN GUARDRAILS</a:t>
+            </a:r>
+          </a:p>
+        </p:txBody>
+      </p:sp>
+      <p:sp>
+        <p:nvSpPr>
+          <p:cNvPr id="10" name="Accent10"/>
+          <p:cNvSpPr/>
+          <p:nvPr/>
+        </p:nvSpPr>
+        <p:spPr>
+          <a:xfrm>
+            <a:off x="584200" y="1587500"/>
+            <a:ext cx="177800" cy="177800"/>
+          </a:xfrm>
+          <a:prstGeom prst="rect">
+            <a:avLst/>
+          </a:prstGeom>
+          <a:solidFill>
+            <a:srgbClr val="00FF41"/>
+          </a:solidFill>
+          <a:ln>
+            <a:noFill/>
+          </a:ln>
+        </p:spPr>
+        <p:txBody>
+          <a:bodyPr wrap="square" lIns="0" tIns="0" rIns="0" bIns="0" anchor="t"/>
+          <a:lstStyle/>
+          <a:p>
+            <a:endParaRPr lang="en-US"/>
+          </a:p>
+        </p:txBody>
+      </p:sp>
+      <p:sp>
+        <p:nvSpPr>
+          <p:cNvPr id="11" name="Line10"/>
+          <p:cNvSpPr/>
+          <p:nvPr/>
+        </p:nvSpPr>
+        <p:spPr>
+          <a:xfrm>
+            <a:off x="660400" y="1765300"/>
+            <a:ext cx="38100" cy="1092200"/>
+          </a:xfrm>
+          <a:prstGeom prst="rect">
+            <a:avLst/>
+          </a:prstGeom>
+          <a:solidFill>
+            <a:srgbClr val="888888"/>
+          </a:solidFill>
+          <a:ln>
+            <a:noFill/>
+          </a:ln>
+        </p:spPr>
+        <p:txBody>
+          <a:bodyPr wrap="square" lIns="0" tIns="0" rIns="0" bIns="0" anchor="t"/>
+          <a:lstStyle/>
+          <a:p>
+            <a:endParaRPr lang="en-US"/>
+          </a:p>
+        </p:txBody>
+      </p:sp>
+      <p:sp>
+        <p:nvSpPr>
+          <p:cNvPr id="12" name="CardTitle10"/>
+          <p:cNvSpPr/>
+          <p:nvPr/>
+        </p:nvSpPr>
+        <p:spPr>
+          <a:xfrm>
+            <a:off x="889000" y="1511300"/>
+            <a:ext cx="4749800" cy="317500"/>
+          </a:xfrm>
+          <a:prstGeom prst="rect">
+            <a:avLst/>
+          </a:prstGeom>
+          <a:noFill/>
+          <a:ln>
+            <a:noFill/>
+          </a:ln>
+        </p:spPr>
+        <p:txBody>
+          <a:bodyPr wrap="square" lIns="0" tIns="0" rIns="0" bIns="0" anchor="t"/>
+          <a:lstStyle/>
+          <a:p>
+            <a:pPr algn="l">
+              <a:spcBef>
+                <a:spcPts val="0"/>
+              </a:spcBef>
+              <a:spcAft>
+                <a:spcPts val="200"/>
+              </a:spcAft>
+            </a:pPr>
+            <a:r>
+              <a:rPr lang="en-US" sz="1400" b="1" dirty="0">
+                <a:solidFill>
+                  <a:srgbClr val="00FF41"/>
+                </a:solidFill>
+                <a:latin typeface="Consolas"/>
+              </a:rPr>
+              <a:t>PROMPT SHIELDS</a:t>
+            </a:r>
+          </a:p>
+        </p:txBody>
+      </p:sp>
+      <p:sp>
+        <p:nvSpPr>
+          <p:cNvPr id="13" name="CardDesc10"/>
+          <p:cNvSpPr/>
+          <p:nvPr/>
+        </p:nvSpPr>
+        <p:spPr>
+          <a:xfrm>
+            <a:off x="889000" y="1816100"/>
+            <a:ext cx="4749800" cy="1092200"/>
+          </a:xfrm>
+          <a:prstGeom prst="rect">
+            <a:avLst/>
+          </a:prstGeom>
+          <a:noFill/>
+          <a:ln>
+            <a:noFill/>
+          </a:ln>
+        </p:spPr>
+        <p:txBody>
+          <a:bodyPr wrap="square" lIns="0" tIns="0" rIns="0" bIns="0" anchor="t"/>
+          <a:lstStyle/>
+          <a:p>
+            <a:pPr algn="l">
+              <a:spcBef>
+                <a:spcPts val="0"/>
+              </a:spcBef>
+              <a:spcAft>
+                <a:spcPts val="200"/>
+              </a:spcAft>
+            </a:pPr>
+            <a:r>
+              <a:rPr lang="en-US" sz="1400" b="0" dirty="0">
+                <a:solidFill>
+                  <a:srgbClr val="CCCCCC"/>
+                </a:solidFill>
+                <a:latin typeface="Segoe UI"/>
+              </a:rPr>
+              <a:t>Real-time detection of direct jailbreaks and indirect prompt injection from docs, emails, and web content. Spotlighting separates trusted vs. untrusted inputs.</a:t>
+            </a:r>
+          </a:p>
+        </p:txBody>
+      </p:sp>
+      <p:sp>
+        <p:nvSpPr>
+          <p:cNvPr id="14" name="Accent14"/>
+          <p:cNvSpPr/>
+          <p:nvPr/>
+        </p:nvSpPr>
+        <p:spPr>
+          <a:xfrm>
+            <a:off x="6096000" y="1587500"/>
+            <a:ext cx="177800" cy="177800"/>
+          </a:xfrm>
+          <a:prstGeom prst="rect">
+            <a:avLst/>
+          </a:prstGeom>
+          <a:solidFill>
+            <a:srgbClr val="00E5FF"/>
+          </a:solidFill>
+          <a:ln>
+            <a:noFill/>
+          </a:ln>
+        </p:spPr>
+        <p:txBody>
+          <a:bodyPr wrap="square" lIns="0" tIns="0" rIns="0" bIns="0" anchor="t"/>
+          <a:lstStyle/>
+          <a:p>
+            <a:endParaRPr lang="en-US"/>
+          </a:p>
+        </p:txBody>
+      </p:sp>
+      <p:sp>
+        <p:nvSpPr>
+          <p:cNvPr id="15" name="Line14"/>
+          <p:cNvSpPr/>
+          <p:nvPr/>
+        </p:nvSpPr>
+        <p:spPr>
+          <a:xfrm>
+            <a:off x="6172200" y="1765300"/>
+            <a:ext cx="38100" cy="1092200"/>
+          </a:xfrm>
+          <a:prstGeom prst="rect">
+            <a:avLst/>
+          </a:prstGeom>
+          <a:solidFill>
+            <a:srgbClr val="888888"/>
+          </a:solidFill>
+          <a:ln>
+            <a:noFill/>
+          </a:ln>
+        </p:spPr>
+        <p:txBody>
+          <a:bodyPr wrap="square" lIns="0" tIns="0" rIns="0" bIns="0" anchor="t"/>
+          <a:lstStyle/>
+          <a:p>
+            <a:endParaRPr lang="en-US"/>
+          </a:p>
+        </p:txBody>
+      </p:sp>
+      <p:sp>
+        <p:nvSpPr>
+          <p:cNvPr id="16" name="CardTitle14"/>
+          <p:cNvSpPr/>
+          <p:nvPr/>
+        </p:nvSpPr>
+        <p:spPr>
+          <a:xfrm>
+            <a:off x="6400800" y="1511300"/>
+            <a:ext cx="4749800" cy="317500"/>
+          </a:xfrm>
+          <a:prstGeom prst="rect">
+            <a:avLst/>
+          </a:prstGeom>
+          <a:noFill/>
+          <a:ln>
+            <a:noFill/>
+          </a:ln>
+        </p:spPr>
+        <p:txBody>
+          <a:bodyPr wrap="square" lIns="0" tIns="0" rIns="0" bIns="0" anchor="t"/>
+          <a:lstStyle/>
+          <a:p>
+            <a:pPr algn="l">
+              <a:spcBef>
+                <a:spcPts val="0"/>
+              </a:spcBef>
+              <a:spcAft>
+                <a:spcPts val="200"/>
+              </a:spcAft>
+            </a:pPr>
+            <a:r>
+              <a:rPr lang="en-US" sz="1400" b="1" dirty="0">
+                <a:solidFill>
+                  <a:srgbClr val="00E5FF"/>
+                </a:solidFill>
+                <a:latin typeface="Consolas"/>
+              </a:rPr>
+              <a:t>CONTENT SAFETY FILTERS</a:t>
+            </a:r>
+          </a:p>
+        </p:txBody>
+      </p:sp>
+      <p:sp>
+        <p:nvSpPr>
+          <p:cNvPr id="17" name="CardDesc14"/>
+          <p:cNvSpPr/>
+          <p:nvPr/>
+        </p:nvSpPr>
+        <p:spPr>
+          <a:xfrm>
+            <a:off x="6400800" y="1816100"/>
+            <a:ext cx="4749800" cy="1092200"/>
+          </a:xfrm>
+          <a:prstGeom prst="rect">
+            <a:avLst/>
+          </a:prstGeom>
+          <a:noFill/>
+          <a:ln>
+            <a:noFill/>
+          </a:ln>
+        </p:spPr>
+        <p:txBody>
+          <a:bodyPr wrap="square" lIns="0" tIns="0" rIns="0" bIns="0" anchor="t"/>
+          <a:lstStyle/>
+          <a:p>
+            <a:pPr algn="l">
+              <a:spcBef>
+                <a:spcPts val="0"/>
+              </a:spcBef>
+              <a:spcAft>
+                <a:spcPts val="200"/>
+              </a:spcAft>
+            </a:pPr>
+            <a:r>
+              <a:rPr lang="en-US" sz="1400" b="0" dirty="0">
+                <a:solidFill>
+                  <a:srgbClr val="CCCCCC"/>
+                </a:solidFill>
+                <a:latin typeface="Segoe UI"/>
+              </a:rPr>
+              <a:t>Configurable severity thresholds for hate, violence, sexual, and self-harm content. Custom blocklists and custom categories with one-line training.</a:t>
+            </a:r>
+          </a:p>
+        </p:txBody>
+      </p:sp>
+      <p:sp>
+        <p:nvSpPr>
+          <p:cNvPr id="18" name="Accent18"/>
+          <p:cNvSpPr/>
+          <p:nvPr/>
+        </p:nvSpPr>
+        <p:spPr>
+          <a:xfrm>
+            <a:off x="584200" y="3263900"/>
+            <a:ext cx="177800" cy="177800"/>
+          </a:xfrm>
+          <a:prstGeom prst="rect">
+            <a:avLst/>
+          </a:prstGeom>
+          <a:solidFill>
+            <a:srgbClr val="FFD700"/>
+          </a:solidFill>
+          <a:ln>
+            <a:noFill/>
+          </a:ln>
+        </p:spPr>
+        <p:txBody>
+          <a:bodyPr wrap="square" lIns="0" tIns="0" rIns="0" bIns="0" anchor="t"/>
+          <a:lstStyle/>
+          <a:p>
+            <a:endParaRPr lang="en-US"/>
+          </a:p>
+        </p:txBody>
+      </p:sp>
+      <p:sp>
+        <p:nvSpPr>
+          <p:cNvPr id="19" name="Line18"/>
+          <p:cNvSpPr/>
+          <p:nvPr/>
+        </p:nvSpPr>
+        <p:spPr>
+          <a:xfrm>
+            <a:off x="660400" y="3441700"/>
+            <a:ext cx="38100" cy="1092200"/>
+          </a:xfrm>
+          <a:prstGeom prst="rect">
+            <a:avLst/>
+          </a:prstGeom>
+          <a:solidFill>
+            <a:srgbClr val="888888"/>
+          </a:solidFill>
+          <a:ln>
+            <a:noFill/>
+          </a:ln>
+        </p:spPr>
+        <p:txBody>
+          <a:bodyPr wrap="square" lIns="0" tIns="0" rIns="0" bIns="0" anchor="t"/>
+          <a:lstStyle/>
+          <a:p>
+            <a:endParaRPr lang="en-US"/>
+          </a:p>
+        </p:txBody>
+      </p:sp>
+      <p:sp>
+        <p:nvSpPr>
+          <p:cNvPr id="20" name="CardTitle18"/>
+          <p:cNvSpPr/>
+          <p:nvPr/>
+        </p:nvSpPr>
+        <p:spPr>
+          <a:xfrm>
+            <a:off x="889000" y="3187700"/>
+            <a:ext cx="4749800" cy="317500"/>
+          </a:xfrm>
+          <a:prstGeom prst="rect">
+            <a:avLst/>
+          </a:prstGeom>
+          <a:noFill/>
+          <a:ln>
+            <a:noFill/>
+          </a:ln>
+        </p:spPr>
+        <p:txBody>
+          <a:bodyPr wrap="square" lIns="0" tIns="0" rIns="0" bIns="0" anchor="t"/>
+          <a:lstStyle/>
+          <a:p>
+            <a:pPr algn="l">
+              <a:spcBef>
+                <a:spcPts val="0"/>
+              </a:spcBef>
+              <a:spcAft>
+                <a:spcPts val="200"/>
+              </a:spcAft>
+            </a:pPr>
+            <a:r>
+              <a:rPr lang="en-US" sz="1400" b="1" dirty="0">
+                <a:solidFill>
+                  <a:srgbClr val="FFD700"/>
+                </a:solidFill>
+                <a:latin typeface="Consolas"/>
+              </a:rPr>
+              <a:t>GROUNDEDNESS DETECTION</a:t>
+            </a:r>
+          </a:p>
+        </p:txBody>
+      </p:sp>
+      <p:sp>
+        <p:nvSpPr>
+          <p:cNvPr id="21" name="CardDesc18"/>
+          <p:cNvSpPr/>
+          <p:nvPr/>
+        </p:nvSpPr>
+        <p:spPr>
+          <a:xfrm>
+            <a:off x="889000" y="3492500"/>
+            <a:ext cx="4749800" cy="1092200"/>
+          </a:xfrm>
+          <a:prstGeom prst="rect">
+            <a:avLst/>
+          </a:prstGeom>
+          <a:noFill/>
+          <a:ln>
+            <a:noFill/>
+          </a:ln>
+        </p:spPr>
+        <p:txBody>
+          <a:bodyPr wrap="square" lIns="0" tIns="0" rIns="0" bIns="0" anchor="t"/>
+          <a:lstStyle/>
+          <a:p>
+            <a:pPr algn="l">
+              <a:spcBef>
+                <a:spcPts val="0"/>
+              </a:spcBef>
+              <a:spcAft>
+                <a:spcPts val="200"/>
+              </a:spcAft>
+            </a:pPr>
+            <a:r>
+              <a:rPr lang="en-US" sz="1400" b="0" dirty="0">
+                <a:solidFill>
+                  <a:srgbClr val="CCCCCC"/>
+                </a:solidFill>
+                <a:latin typeface="Segoe UI"/>
+              </a:rPr>
+              <a:t>Automatically detects hallucinations by checking AI outputs against source documents. Includes reasoning and auto-correction capabilities.</a:t>
+            </a:r>
+          </a:p>
+        </p:txBody>
+      </p:sp>
+      <p:sp>
+        <p:nvSpPr>
+          <p:cNvPr id="22" name="Accent22"/>
+          <p:cNvSpPr/>
+          <p:nvPr/>
+        </p:nvSpPr>
+        <p:spPr>
+          <a:xfrm>
+            <a:off x="6096000" y="3263900"/>
+            <a:ext cx="177800" cy="177800"/>
+          </a:xfrm>
+          <a:prstGeom prst="rect">
+            <a:avLst/>
+          </a:prstGeom>
+          <a:solidFill>
+            <a:srgbClr val="FF0044"/>
+          </a:solidFill>
+          <a:ln>
+            <a:noFill/>
+          </a:ln>
+        </p:spPr>
+        <p:txBody>
+          <a:bodyPr wrap="square" lIns="0" tIns="0" rIns="0" bIns="0" anchor="t"/>
+          <a:lstStyle/>
+          <a:p>
+            <a:endParaRPr lang="en-US"/>
+          </a:p>
+        </p:txBody>
+      </p:sp>
+      <p:sp>
+        <p:nvSpPr>
+          <p:cNvPr id="23" name="Line22"/>
+          <p:cNvSpPr/>
+          <p:nvPr/>
+        </p:nvSpPr>
+        <p:spPr>
+          <a:xfrm>
+            <a:off x="6172200" y="3441700"/>
+            <a:ext cx="38100" cy="1092200"/>
+          </a:xfrm>
+          <a:prstGeom prst="rect">
+            <a:avLst/>
+          </a:prstGeom>
+          <a:solidFill>
+            <a:srgbClr val="888888"/>
+          </a:solidFill>
+          <a:ln>
+            <a:noFill/>
+          </a:ln>
+        </p:spPr>
+        <p:txBody>
+          <a:bodyPr wrap="square" lIns="0" tIns="0" rIns="0" bIns="0" anchor="t"/>
+          <a:lstStyle/>
+          <a:p>
+            <a:endParaRPr lang="en-US"/>
+          </a:p>
+        </p:txBody>
+      </p:sp>
+      <p:sp>
+        <p:nvSpPr>
+          <p:cNvPr id="24" name="CardTitle22"/>
+          <p:cNvSpPr/>
+          <p:nvPr/>
+        </p:nvSpPr>
+        <p:spPr>
+          <a:xfrm>
+            <a:off x="6400800" y="3187700"/>
+            <a:ext cx="4749800" cy="317500"/>
+          </a:xfrm>
+          <a:prstGeom prst="rect">
+            <a:avLst/>
+          </a:prstGeom>
+          <a:noFill/>
+          <a:ln>
+            <a:noFill/>
+          </a:ln>
+        </p:spPr>
+        <p:txBody>
+          <a:bodyPr wrap="square" lIns="0" tIns="0" rIns="0" bIns="0" anchor="t"/>
+          <a:lstStyle/>
+          <a:p>
+            <a:pPr algn="l">
+              <a:spcBef>
+                <a:spcPts val="0"/>
+              </a:spcBef>
+              <a:spcAft>
+                <a:spcPts val="200"/>
+              </a:spcAft>
+            </a:pPr>
+            <a:r>
+              <a:rPr lang="en-US" sz="1400" b="1" dirty="0">
+                <a:solidFill>
+                  <a:srgbClr val="FF0044"/>
+                </a:solidFill>
+                <a:latin typeface="Consolas"/>
+              </a:rPr>
+              <a:t>PROTECTED MATERIAL</a:t>
+            </a:r>
+          </a:p>
+        </p:txBody>
+      </p:sp>
+      <p:sp>
+        <p:nvSpPr>
+          <p:cNvPr id="25" name="CardDesc22"/>
+          <p:cNvSpPr/>
+          <p:nvPr/>
+        </p:nvSpPr>
+        <p:spPr>
+          <a:xfrm>
+            <a:off x="6400800" y="3492500"/>
+            <a:ext cx="4749800" cy="1092200"/>
+          </a:xfrm>
+          <a:prstGeom prst="rect">
+            <a:avLst/>
+          </a:prstGeom>
+          <a:noFill/>
+          <a:ln>
+            <a:noFill/>
+          </a:ln>
+        </p:spPr>
+        <p:txBody>
+          <a:bodyPr wrap="square" lIns="0" tIns="0" rIns="0" bIns="0" anchor="t"/>
+          <a:lstStyle/>
+          <a:p>
+            <a:pPr algn="l">
+              <a:spcBef>
+                <a:spcPts val="0"/>
+              </a:spcBef>
+              <a:spcAft>
+                <a:spcPts val="200"/>
+              </a:spcAft>
+            </a:pPr>
+            <a:r>
+              <a:rPr lang="en-US" sz="1400" b="0" dirty="0">
+                <a:solidFill>
+                  <a:srgbClr val="CCCCCC"/>
+                </a:solidFill>
+                <a:latin typeface="Segoe UI"/>
+              </a:rPr>
+              <a:t>Identifies copyrighted text (lyrics, articles, recipes) and code from public GitHub repos in AI outputs. Prevents IP infringement at the API layer.</a:t>
+            </a:r>
+          </a:p>
+        </p:txBody>
+      </p:sp>
+      <p:sp>
+        <p:nvSpPr>
+          <p:cNvPr id="30" name="CalloutBox"/>
+          <p:cNvSpPr/>
+          <p:nvPr/>
+        </p:nvSpPr>
+        <p:spPr>
+          <a:xfrm>
+            <a:off x="457200" y="4889500"/>
+            <a:ext cx="11277600" cy="1320800"/>
+          </a:xfrm>
+          <a:prstGeom prst="roundRect">
+            <a:avLst>
+              <a:gd name="adj" fmla="val 8000"/>
+            </a:avLst>
+          </a:prstGeom>
+          <a:solidFill>
+            <a:srgbClr val="141414"/>
+          </a:solidFill>
+          <a:ln>
+            <a:noFill/>
+          </a:ln>
+        </p:spPr>
+        <p:txBody>
+          <a:bodyPr wrap="square" lIns="91440" tIns="45720" rIns="91440" bIns="45720" anchor="t"/>
+          <a:lstStyle/>
+          <a:p>
+            <a:endParaRPr lang="en-US"/>
+          </a:p>
+        </p:txBody>
+      </p:sp>
+      <p:sp>
+        <p:nvSpPr>
+          <p:cNvPr id="31" name="CalloutText"/>
+          <p:cNvSpPr/>
+          <p:nvPr/>
+        </p:nvSpPr>
+        <p:spPr>
+          <a:xfrm>
+            <a:off x="635000" y="4940300"/>
+            <a:ext cx="10972800" cy="1193800"/>
+          </a:xfrm>
+          <a:prstGeom prst="rect">
+            <a:avLst/>
+          </a:prstGeom>
+          <a:noFill/>
+          <a:ln>
+            <a:noFill/>
+          </a:ln>
+        </p:spPr>
+        <p:txBody>
+          <a:bodyPr wrap="square" lIns="0" tIns="0" rIns="0" bIns="0" anchor="t"/>
+          <a:lstStyle/>
+          <a:p>
+            <a:pPr algn="l">
+              <a:spcBef>
+                <a:spcPts val="0"/>
+              </a:spcBef>
+              <a:spcAft>
+                <a:spcPts val="400"/>
+              </a:spcAft>
+            </a:pPr>
+            <a:r>
+              <a:rPr lang="en-US" sz="1400" b="1" dirty="0">
+                <a:solidFill>
+                  <a:srgbClr val="BB86FC"/>
+                </a:solidFill>
+                <a:latin typeface="Consolas"/>
+              </a:rPr>
+              <a:t>KEY INSIGHT</a:t>
+            </a:r>
+          </a:p>
+          <a:p>
+            <a:pPr algn="l">
+              <a:spcBef>
+                <a:spcPts val="0"/>
+              </a:spcBef>
+              <a:spcAft>
+                <a:spcPts val="400"/>
+              </a:spcAft>
+            </a:pPr>
+            <a:r>
+              <a:rPr lang="en-US" sz="1400" b="0" dirty="0">
+                <a:solidFill>
+                  <a:srgbClr val="CCCCCC"/>
+                </a:solidFill>
+                <a:latin typeface="Segoe UI"/>
+              </a:rPr>
+              <a:t>▸  All guardrails run as middleware — pre-model (input) and post-model (output) — so they apply to every model in the catalog without code changes</a:t>
+            </a:r>
+          </a:p>
+          <a:p>
+            <a:pPr algn="l">
+              <a:spcBef>
+                <a:spcPts val="0"/>
+              </a:spcBef>
+              <a:spcAft>
+                <a:spcPts val="400"/>
+              </a:spcAft>
+            </a:pPr>
+            <a:r>
+              <a:rPr lang="en-US" sz="1400" b="0" dirty="0">
+                <a:solidFill>
+                  <a:srgbClr val="CCCCCC"/>
+                </a:solidFill>
+                <a:latin typeface="Segoe UI"/>
+              </a:rPr>
+              <a:t>▸  Supports 100+ languages; deployable on cloud, on-premises, and on-device</a:t>
+            </a:r>
+          </a:p>
+        </p:txBody>
+      </p:sp>
+      <p:sp>
+        <p:nvSpPr>
+          <p:cNvPr id="40" name="Footer"/>
+          <p:cNvSpPr/>
+          <p:nvPr/>
+        </p:nvSpPr>
+        <p:spPr>
+          <a:xfrm>
+            <a:off x="457200" y="6400800"/>
+            <a:ext cx="4572000" cy="368300"/>
+          </a:xfrm>
+          <a:prstGeom prst="rect">
+            <a:avLst/>
+          </a:prstGeom>
+          <a:noFill/>
+          <a:ln>
+            <a:noFill/>
+          </a:ln>
+        </p:spPr>
+        <p:txBody>
+          <a:bodyPr wrap="square" lIns="0" tIns="0" rIns="0" bIns="0" anchor="t"/>
+          <a:lstStyle/>
+          <a:p>
+            <a:pPr algn="l">
+              <a:spcBef>
+                <a:spcPts val="0"/>
+              </a:spcBef>
+              <a:spcAft>
+                <a:spcPts val="600"/>
+              </a:spcAft>
+            </a:pPr>
+            <a:r>
+              <a:rPr lang="en-US" sz="1000" b="0" dirty="0">
+                <a:solidFill>
+                  <a:srgbClr val="888888"/>
+                </a:solidFill>
+                <a:latin typeface="Consolas"/>
+              </a:rPr>
+              <a:t>HACKING AND SECURING LLMs</a:t>
+            </a:r>
+          </a:p>
+        </p:txBody>
+      </p:sp>
+      <p:sp>
+        <p:nvSpPr>
+          <p:cNvPr id="41" name="SlideNum"/>
+          <p:cNvSpPr/>
+          <p:nvPr/>
+        </p:nvSpPr>
+        <p:spPr>
+          <a:xfrm>
+            <a:off x="10515600" y="6400800"/>
+            <a:ext cx="1371600" cy="368300"/>
+          </a:xfrm>
+          <a:prstGeom prst="rect">
+            <a:avLst/>
+          </a:prstGeom>
+          <a:noFill/>
+          <a:ln>
+            <a:noFill/>
+          </a:ln>
+        </p:spPr>
+        <p:txBody>
+          <a:bodyPr wrap="square" lIns="0" tIns="0" rIns="0" bIns="0" anchor="t"/>
+          <a:lstStyle/>
+          <a:p>
+            <a:pPr algn="r">
+              <a:spcBef>
+                <a:spcPts val="0"/>
+              </a:spcBef>
+              <a:spcAft>
+                <a:spcPts val="600"/>
+              </a:spcAft>
+            </a:pPr>
+            <a:r>
+              <a:rPr lang="en-US" sz="1100" b="0" dirty="0">
+                <a:solidFill>
+                  <a:srgbClr val="888888"/>
+                </a:solidFill>
+                <a:latin typeface="Consolas"/>
+              </a:rPr>
+              <a:t>12 / 14</a:t>
+            </a:r>
+          </a:p>
+        </p:txBody>
+      </p:sp>
+    </p:spTree>
+    <p:extLst>
+      <p:ext uri="{BB962C8B-B14F-4D97-AF65-F5344CB8AC3E}">
+        <p14:creationId xmlns:p14="http://schemas.microsoft.com/office/powerpoint/2010/main" val="140194714"/>
+      </p:ext>
+    </p:extLst>
+  </p:cSld>
+  <p:clrMapOvr>
+    <a:masterClrMapping/>
+  </p:clrMapOvr>
+</p:sld>
+</file>
+
+<file path=ppt/slides/slide13.xml><?xml version="1.0" encoding="utf-8"?>
+<p:sld xmlns:a="http://schemas.openxmlformats.org/drawingml/2006/main" xmlns:r="http://schemas.openxmlformats.org/officeDocument/2006/relationships" xmlns:p="http://schemas.openxmlformats.org/presentationml/2006/main">
+  <p:cSld>
+    <p:bg>
+      <p:bgPr>
+        <a:solidFill>
+          <a:srgbClr val="121212">
+            <a:alpha val="100000"/>
+          </a:srgbClr>
+        </a:solidFill>
+        <a:effectLst/>
+      </p:bgPr>
+    </p:bg>
+    <p:spTree>
+      <p:nvGrpSpPr>
+        <p:cNvPr id="1" name=""/>
+        <p:cNvGrpSpPr/>
+        <p:nvPr/>
+      </p:nvGrpSpPr>
+      <p:grpSpPr>
+        <a:xfrm>
+          <a:off x="0" y="0"/>
+          <a:ext cx="0" cy="0"/>
+          <a:chOff x="0" y="0"/>
+          <a:chExt cx="0" cy="0"/>
+        </a:xfrm>
+      </p:grpSpPr>
+      <p:sp>
+        <p:nvSpPr>
+          <p:cNvPr id="2" name="Title"/>
+          <p:cNvSpPr/>
+          <p:nvPr/>
+        </p:nvSpPr>
+        <p:spPr>
+          <a:xfrm>
+            <a:off x="457200" y="279400"/>
+            <a:ext cx="11277600" cy="635000"/>
+          </a:xfrm>
+          <a:prstGeom prst="rect">
+            <a:avLst/>
+          </a:prstGeom>
+          <a:noFill/>
+          <a:ln>
+            <a:noFill/>
+          </a:ln>
+        </p:spPr>
+        <p:txBody>
+          <a:bodyPr wrap="square" lIns="0" tIns="0" rIns="0" bIns="0" anchor="t"/>
+          <a:lstStyle/>
+          <a:p>
+            <a:pPr algn="l">
+              <a:spcBef>
+                <a:spcPts val="0"/>
+              </a:spcBef>
+              <a:spcAft>
+                <a:spcPts val="600"/>
+              </a:spcAft>
+            </a:pPr>
+            <a:r>
+              <a:rPr lang="en-US" sz="1400" b="0" dirty="0">
+                <a:solidFill>
+                  <a:srgbClr val="BB86FC"/>
+                </a:solidFill>
+                <a:latin typeface="Consolas"/>
+              </a:rPr>
+              <a:t>// AZURE AI FOUNDRY — DEFENSE IN DEPTH</a:t>
+            </a:r>
+          </a:p>
+        </p:txBody>
+      </p:sp>
+      <p:sp>
+        <p:nvSpPr>
+          <p:cNvPr id="3" name="Divider"/>
+          <p:cNvSpPr/>
+          <p:nvPr/>
+        </p:nvSpPr>
+        <p:spPr>
+          <a:xfrm>
+            <a:off x="457200" y="825500"/>
+            <a:ext cx="11277600" cy="25400"/>
+          </a:xfrm>
+          <a:prstGeom prst="rect">
+            <a:avLst/>
+          </a:prstGeom>
+          <a:solidFill>
+            <a:srgbClr val="BB86FC"/>
+          </a:solidFill>
+          <a:ln>
+            <a:noFill/>
+          </a:ln>
+        </p:spPr>
+        <p:txBody>
+          <a:bodyPr wrap="square" lIns="0" tIns="0" rIns="0" bIns="0" anchor="t"/>
+          <a:lstStyle/>
+          <a:p>
+            <a:endParaRPr lang="en-US"/>
+          </a:p>
+        </p:txBody>
+      </p:sp>
+      <p:sp>
+        <p:nvSpPr>
+          <p:cNvPr id="4" name="LeftHeader"/>
+          <p:cNvSpPr/>
+          <p:nvPr/>
+        </p:nvSpPr>
+        <p:spPr>
+          <a:xfrm>
+            <a:off x="457200" y="1054100"/>
+            <a:ext cx="5486400" cy="368300"/>
+          </a:xfrm>
+          <a:prstGeom prst="rect">
+            <a:avLst/>
+          </a:prstGeom>
+          <a:noFill/>
+          <a:ln>
+            <a:noFill/>
+          </a:ln>
+        </p:spPr>
+        <p:txBody>
+          <a:bodyPr wrap="square" lIns="0" tIns="0" rIns="0" bIns="0" anchor="t"/>
+          <a:lstStyle/>
+          <a:p>
+            <a:pPr algn="l">
+              <a:spcBef>
+                <a:spcPts val="0"/>
+              </a:spcBef>
+              <a:spcAft>
+                <a:spcPts val="600"/>
+              </a:spcAft>
+            </a:pPr>
+            <a:r>
+              <a:rPr lang="en-US" sz="1400" b="1" dirty="0">
+                <a:solidFill>
+                  <a:srgbClr val="BB86FC"/>
+                </a:solidFill>
+                <a:latin typeface="Consolas"/>
+              </a:rPr>
+              <a:t>PLATFORM SECURITY</a:t>
+            </a:r>
+          </a:p>
+        </p:txBody>
+      </p:sp>
+      <p:sp>
+        <p:nvSpPr>
+          <p:cNvPr id="5" name="RightHeader"/>
+          <p:cNvSpPr/>
+          <p:nvPr/>
+        </p:nvSpPr>
+        <p:spPr>
+          <a:xfrm>
+            <a:off x="6223000" y="1054100"/>
+            <a:ext cx="5486400" cy="368300"/>
+          </a:xfrm>
+          <a:prstGeom prst="rect">
+            <a:avLst/>
+          </a:prstGeom>
+          <a:noFill/>
+          <a:ln>
+            <a:noFill/>
+          </a:ln>
+        </p:spPr>
+        <p:txBody>
+          <a:bodyPr wrap="square" lIns="0" tIns="0" rIns="0" bIns="0" anchor="t"/>
+          <a:lstStyle/>
+          <a:p>
+            <a:pPr algn="l">
+              <a:spcBef>
+                <a:spcPts val="0"/>
+              </a:spcBef>
+              <a:spcAft>
+                <a:spcPts val="600"/>
+              </a:spcAft>
+            </a:pPr>
+            <a:r>
+              <a:rPr lang="en-US" sz="1400" b="1" dirty="0">
+                <a:solidFill>
+                  <a:srgbClr val="00E5FF"/>
+                </a:solidFill>
+                <a:latin typeface="Consolas"/>
+              </a:rPr>
+              <a:t>RUNTIME PROTECTION</a:t>
+            </a:r>
+          </a:p>
+        </p:txBody>
+      </p:sp>
+      <p:sp>
+        <p:nvSpPr>
+          <p:cNvPr id="10" name="LeftBar0"/>
+          <p:cNvSpPr/>
+          <p:nvPr/>
+        </p:nvSpPr>
+        <p:spPr>
+          <a:xfrm>
+            <a:off x="457200" y="1460500"/>
+            <a:ext cx="50800" cy="914400"/>
+          </a:xfrm>
+          <a:prstGeom prst="rect">
+            <a:avLst/>
+          </a:prstGeom>
+          <a:solidFill>
+            <a:srgbClr val="00FF41"/>
+          </a:solidFill>
+          <a:ln>
+            <a:noFill/>
+          </a:ln>
+        </p:spPr>
+        <p:txBody>
+          <a:bodyPr wrap="square" lIns="0" tIns="0" rIns="0" bIns="0" anchor="t"/>
+          <a:lstStyle/>
+          <a:p>
+            <a:endParaRPr lang="en-US"/>
+          </a:p>
+        </p:txBody>
+      </p:sp>
+      <p:sp>
+        <p:nvSpPr>
+          <p:cNvPr id="11" name="LeftTitle0"/>
+          <p:cNvSpPr/>
+          <p:nvPr/>
+        </p:nvSpPr>
+        <p:spPr>
+          <a:xfrm>
+            <a:off x="635000" y="1460500"/>
+            <a:ext cx="4826000" cy="279400"/>
+          </a:xfrm>
+          <a:prstGeom prst="rect">
+            <a:avLst/>
+          </a:prstGeom>
+          <a:noFill/>
+          <a:ln>
+            <a:noFill/>
+          </a:ln>
+        </p:spPr>
+        <p:txBody>
+          <a:bodyPr wrap="square" lIns="0" tIns="0" rIns="0" bIns="0" anchor="t"/>
+          <a:lstStyle/>
+          <a:p>
+            <a:pPr algn="l">
+              <a:spcBef>
+                <a:spcPts val="0"/>
+              </a:spcBef>
+              <a:spcAft>
+                <a:spcPts val="100"/>
+              </a:spcAft>
+            </a:pPr>
+            <a:r>
+              <a:rPr lang="en-US" sz="1400" b="1" dirty="0">
+                <a:solidFill>
+                  <a:srgbClr val="00FF41"/>
+                </a:solidFill>
+                <a:latin typeface="Consolas"/>
+              </a:rPr>
+              <a:t>Zero-Trust Architecture</a:t>
+            </a:r>
+          </a:p>
+        </p:txBody>
+      </p:sp>
+      <p:sp>
+        <p:nvSpPr>
+          <p:cNvPr id="12" name="LeftDesc0"/>
+          <p:cNvSpPr/>
+          <p:nvPr/>
+        </p:nvSpPr>
+        <p:spPr>
+          <a:xfrm>
+            <a:off x="635000" y="1739900"/>
+            <a:ext cx="5080000" cy="635000"/>
+          </a:xfrm>
+          <a:prstGeom prst="rect">
+            <a:avLst/>
+          </a:prstGeom>
+          <a:noFill/>
+          <a:ln>
+            <a:noFill/>
+          </a:ln>
+        </p:spPr>
+        <p:txBody>
+          <a:bodyPr wrap="square" lIns="0" tIns="0" rIns="0" bIns="0" anchor="t"/>
+          <a:lstStyle/>
+          <a:p>
+            <a:pPr algn="l">
+              <a:spcBef>
+                <a:spcPts val="0"/>
+              </a:spcBef>
+              <a:spcAft>
+                <a:spcPts val="200"/>
+              </a:spcAft>
+            </a:pPr>
+            <a:r>
+              <a:rPr lang="en-US" sz="1400" b="0" dirty="0">
+                <a:solidFill>
+                  <a:srgbClr val="CCCCCC"/>
+                </a:solidFill>
+                <a:latin typeface="Segoe UI"/>
+              </a:rPr>
+              <a:t>Models run isolated in Azure VMs with no breakout capability. No runtime connections to model providers — 100% hosted by Microsoft.</a:t>
+            </a:r>
+          </a:p>
+        </p:txBody>
+      </p:sp>
+      <p:sp>
+        <p:nvSpPr>
+          <p:cNvPr id="14" name="LeftBar1"/>
+          <p:cNvSpPr/>
+          <p:nvPr/>
+        </p:nvSpPr>
+        <p:spPr>
+          <a:xfrm>
+            <a:off x="457200" y="2451100"/>
+            <a:ext cx="50800" cy="914400"/>
+          </a:xfrm>
+          <a:prstGeom prst="rect">
+            <a:avLst/>
+          </a:prstGeom>
+          <a:solidFill>
+            <a:srgbClr val="FFD700"/>
+          </a:solidFill>
+          <a:ln>
+            <a:noFill/>
+          </a:ln>
+        </p:spPr>
+        <p:txBody>
+          <a:bodyPr wrap="square" lIns="0" tIns="0" rIns="0" bIns="0" anchor="t"/>
+          <a:lstStyle/>
+          <a:p>
+            <a:endParaRPr lang="en-US"/>
+          </a:p>
+        </p:txBody>
+      </p:sp>
+      <p:sp>
+        <p:nvSpPr>
+          <p:cNvPr id="15" name="LeftTitle1"/>
+          <p:cNvSpPr/>
+          <p:nvPr/>
+        </p:nvSpPr>
+        <p:spPr>
+          <a:xfrm>
+            <a:off x="635000" y="2451100"/>
+            <a:ext cx="4826000" cy="279400"/>
+          </a:xfrm>
+          <a:prstGeom prst="rect">
+            <a:avLst/>
+          </a:prstGeom>
+          <a:noFill/>
+          <a:ln>
+            <a:noFill/>
+          </a:ln>
+        </p:spPr>
+        <p:txBody>
+          <a:bodyPr wrap="square" lIns="0" tIns="0" rIns="0" bIns="0" anchor="t"/>
+          <a:lstStyle/>
+          <a:p>
+            <a:pPr algn="l">
+              <a:spcBef>
+                <a:spcPts val="0"/>
+              </a:spcBef>
+              <a:spcAft>
+                <a:spcPts val="100"/>
+              </a:spcAft>
+            </a:pPr>
+            <a:r>
+              <a:rPr lang="en-US" sz="1400" b="1" dirty="0">
+                <a:solidFill>
+                  <a:srgbClr val="FFD700"/>
+                </a:solidFill>
+                <a:latin typeface="Consolas"/>
+              </a:rPr>
+              <a:t>Model Security Scanning</a:t>
+            </a:r>
+          </a:p>
+        </p:txBody>
+      </p:sp>
+      <p:sp>
+        <p:nvSpPr>
+          <p:cNvPr id="16" name="LeftDesc1"/>
+          <p:cNvSpPr/>
+          <p:nvPr/>
+        </p:nvSpPr>
+        <p:spPr>
+          <a:xfrm>
+            <a:off x="635000" y="2730500"/>
+            <a:ext cx="5080000" cy="635000"/>
+          </a:xfrm>
+          <a:prstGeom prst="rect">
+            <a:avLst/>
+          </a:prstGeom>
+          <a:noFill/>
+          <a:ln>
+            <a:noFill/>
+          </a:ln>
+        </p:spPr>
+        <p:txBody>
+          <a:bodyPr wrap="square" lIns="0" tIns="0" rIns="0" bIns="0" anchor="t"/>
+          <a:lstStyle/>
+          <a:p>
+            <a:pPr algn="l">
+              <a:spcBef>
+                <a:spcPts val="0"/>
+              </a:spcBef>
+              <a:spcAft>
+                <a:spcPts val="200"/>
+              </a:spcAft>
+            </a:pPr>
+            <a:r>
+              <a:rPr lang="en-US" sz="1400" b="0" dirty="0">
+                <a:solidFill>
+                  <a:srgbClr val="CCCCCC"/>
+                </a:solidFill>
+                <a:latin typeface="Segoe UI"/>
+              </a:rPr>
+              <a:t>Pre-release malware analysis, vulnerability testing, and continuous monitoring for all catalog models. Model cards for risk assessment.</a:t>
+            </a:r>
+          </a:p>
+        </p:txBody>
+      </p:sp>
+      <p:sp>
+        <p:nvSpPr>
+          <p:cNvPr id="18" name="LeftBar2"/>
+          <p:cNvSpPr/>
+          <p:nvPr/>
+        </p:nvSpPr>
+        <p:spPr>
+          <a:xfrm>
+            <a:off x="457200" y="3441700"/>
+            <a:ext cx="50800" cy="914400"/>
+          </a:xfrm>
+          <a:prstGeom prst="rect">
+            <a:avLst/>
+          </a:prstGeom>
+          <a:solidFill>
+            <a:srgbClr val="FF0044"/>
+          </a:solidFill>
+          <a:ln>
+            <a:noFill/>
+          </a:ln>
+        </p:spPr>
+        <p:txBody>
+          <a:bodyPr wrap="square" lIns="0" tIns="0" rIns="0" bIns="0" anchor="t"/>
+          <a:lstStyle/>
+          <a:p>
+            <a:endParaRPr lang="en-US"/>
+          </a:p>
+        </p:txBody>
+      </p:sp>
+      <p:sp>
+        <p:nvSpPr>
+          <p:cNvPr id="19" name="LeftTitle2"/>
+          <p:cNvSpPr/>
+          <p:nvPr/>
+        </p:nvSpPr>
+        <p:spPr>
+          <a:xfrm>
+            <a:off x="635000" y="3441700"/>
+            <a:ext cx="4826000" cy="279400"/>
+          </a:xfrm>
+          <a:prstGeom prst="rect">
+            <a:avLst/>
+          </a:prstGeom>
+          <a:noFill/>
+          <a:ln>
+            <a:noFill/>
+          </a:ln>
+        </p:spPr>
+        <p:txBody>
+          <a:bodyPr wrap="square" lIns="0" tIns="0" rIns="0" bIns="0" anchor="t"/>
+          <a:lstStyle/>
+          <a:p>
+            <a:pPr algn="l">
+              <a:spcBef>
+                <a:spcPts val="0"/>
+              </a:spcBef>
+              <a:spcAft>
+                <a:spcPts val="100"/>
+              </a:spcAft>
+            </a:pPr>
+            <a:r>
+              <a:rPr lang="en-US" sz="1400" b="1" dirty="0">
+                <a:solidFill>
+                  <a:srgbClr val="FF0044"/>
+                </a:solidFill>
+                <a:latin typeface="Consolas"/>
+              </a:rPr>
+              <a:t>Data Sovereignty</a:t>
+            </a:r>
+          </a:p>
+        </p:txBody>
+      </p:sp>
+      <p:sp>
+        <p:nvSpPr>
+          <p:cNvPr id="20" name="LeftDesc2"/>
+          <p:cNvSpPr/>
+          <p:nvPr/>
+        </p:nvSpPr>
+        <p:spPr>
+          <a:xfrm>
+            <a:off x="635000" y="3721100"/>
+            <a:ext cx="5080000" cy="635000"/>
+          </a:xfrm>
+          <a:prstGeom prst="rect">
+            <a:avLst/>
+          </a:prstGeom>
+          <a:noFill/>
+          <a:ln>
+            <a:noFill/>
+          </a:ln>
+        </p:spPr>
+        <p:txBody>
+          <a:bodyPr wrap="square" lIns="0" tIns="0" rIns="0" bIns="0" anchor="t"/>
+          <a:lstStyle/>
+          <a:p>
+            <a:pPr algn="l">
+              <a:spcBef>
+                <a:spcPts val="0"/>
+              </a:spcBef>
+              <a:spcAft>
+                <a:spcPts val="200"/>
+              </a:spcAft>
+            </a:pPr>
+            <a:r>
+              <a:rPr lang="en-US" sz="1400" b="0" dirty="0">
+                <a:solidFill>
+                  <a:srgbClr val="CCCCCC"/>
+                </a:solidFill>
+                <a:latin typeface="Segoe UI"/>
+              </a:rPr>
+              <a:t>Customer data never used to train shared models. Inputs/outputs treated as customer content with same protections as docs and email.</a:t>
+            </a:r>
+          </a:p>
+        </p:txBody>
+      </p:sp>
+      <p:sp>
+        <p:nvSpPr>
+          <p:cNvPr id="22" name="LeftBar3"/>
+          <p:cNvSpPr/>
+          <p:nvPr/>
+        </p:nvSpPr>
+        <p:spPr>
+          <a:xfrm>
+            <a:off x="457200" y="4432300"/>
+            <a:ext cx="50800" cy="914400"/>
+          </a:xfrm>
+          <a:prstGeom prst="rect">
+            <a:avLst/>
+          </a:prstGeom>
+          <a:solidFill>
+            <a:srgbClr val="BB86FC"/>
+          </a:solidFill>
+          <a:ln>
+            <a:noFill/>
+          </a:ln>
+        </p:spPr>
+        <p:txBody>
+          <a:bodyPr wrap="square" lIns="0" tIns="0" rIns="0" bIns="0" anchor="t"/>
+          <a:lstStyle/>
+          <a:p>
+            <a:endParaRPr lang="en-US"/>
+          </a:p>
+        </p:txBody>
+      </p:sp>
+      <p:sp>
+        <p:nvSpPr>
+          <p:cNvPr id="23" name="LeftTitle3"/>
+          <p:cNvSpPr/>
+          <p:nvPr/>
+        </p:nvSpPr>
+        <p:spPr>
+          <a:xfrm>
+            <a:off x="635000" y="4432300"/>
+            <a:ext cx="4826000" cy="279400"/>
+          </a:xfrm>
+          <a:prstGeom prst="rect">
+            <a:avLst/>
+          </a:prstGeom>
+          <a:noFill/>
+          <a:ln>
+            <a:noFill/>
+          </a:ln>
+        </p:spPr>
+        <p:txBody>
+          <a:bodyPr wrap="square" lIns="0" tIns="0" rIns="0" bIns="0" anchor="t"/>
+          <a:lstStyle/>
+          <a:p>
+            <a:pPr algn="l">
+              <a:spcBef>
+                <a:spcPts val="0"/>
+              </a:spcBef>
+              <a:spcAft>
+                <a:spcPts val="100"/>
+              </a:spcAft>
+            </a:pPr>
+            <a:r>
+              <a:rPr lang="en-US" sz="1400" b="1" dirty="0">
+                <a:solidFill>
+                  <a:srgbClr val="BB86FC"/>
+                </a:solidFill>
+                <a:latin typeface="Consolas"/>
+              </a:rPr>
+              <a:t>Identity &amp; Access Control</a:t>
+            </a:r>
+          </a:p>
+        </p:txBody>
+      </p:sp>
+      <p:sp>
+        <p:nvSpPr>
+          <p:cNvPr id="24" name="LeftDesc3"/>
+          <p:cNvSpPr/>
+          <p:nvPr/>
+        </p:nvSpPr>
+        <p:spPr>
+          <a:xfrm>
+            <a:off x="635000" y="4711700"/>
+            <a:ext cx="5080000" cy="635000"/>
+          </a:xfrm>
+          <a:prstGeom prst="rect">
+            <a:avLst/>
+          </a:prstGeom>
+          <a:noFill/>
+          <a:ln>
+            <a:noFill/>
+          </a:ln>
+        </p:spPr>
+        <p:txBody>
+          <a:bodyPr wrap="square" lIns="0" tIns="0" rIns="0" bIns="0" anchor="t"/>
+          <a:lstStyle/>
+          <a:p>
+            <a:pPr algn="l">
+              <a:spcBef>
+                <a:spcPts val="0"/>
+              </a:spcBef>
+              <a:spcAft>
+                <a:spcPts val="200"/>
+              </a:spcAft>
+            </a:pPr>
+            <a:r>
+              <a:rPr lang="en-US" sz="1400" b="0" dirty="0">
+                <a:solidFill>
+                  <a:srgbClr val="CCCCCC"/>
+                </a:solidFill>
+                <a:latin typeface="Segoe UI"/>
+              </a:rPr>
+              <a:t>Azure Managed Identities, Entra ID conditional access, Key Vault for secrets. No hardcoded credentials in code.</a:t>
+            </a:r>
+          </a:p>
+        </p:txBody>
+      </p:sp>
+      <p:sp>
+        <p:nvSpPr>
+          <p:cNvPr id="30" name="RightBar0"/>
+          <p:cNvSpPr/>
+          <p:nvPr/>
+        </p:nvSpPr>
+        <p:spPr>
+          <a:xfrm>
+            <a:off x="6223000" y="1460500"/>
+            <a:ext cx="50800" cy="914400"/>
+          </a:xfrm>
+          <a:prstGeom prst="rect">
+            <a:avLst/>
+          </a:prstGeom>
+          <a:solidFill>
+            <a:srgbClr val="00E5FF"/>
+          </a:solidFill>
+          <a:ln>
+            <a:noFill/>
+          </a:ln>
+        </p:spPr>
+        <p:txBody>
+          <a:bodyPr wrap="square" lIns="0" tIns="0" rIns="0" bIns="0" anchor="t"/>
+          <a:lstStyle/>
+          <a:p>
+            <a:endParaRPr lang="en-US"/>
+          </a:p>
+        </p:txBody>
+      </p:sp>
+      <p:sp>
+        <p:nvSpPr>
+          <p:cNvPr id="31" name="RightTitle0"/>
+          <p:cNvSpPr/>
+          <p:nvPr/>
+        </p:nvSpPr>
+        <p:spPr>
+          <a:xfrm>
+            <a:off x="6400800" y="1460500"/>
+            <a:ext cx="5080000" cy="279400"/>
+          </a:xfrm>
+          <a:prstGeom prst="rect">
+            <a:avLst/>
+          </a:prstGeom>
+          <a:noFill/>
+          <a:ln>
+            <a:noFill/>
+          </a:ln>
+        </p:spPr>
+        <p:txBody>
+          <a:bodyPr wrap="square" lIns="0" tIns="0" rIns="0" bIns="0" anchor="t"/>
+          <a:lstStyle/>
+          <a:p>
+            <a:pPr algn="l">
+              <a:spcBef>
+                <a:spcPts val="0"/>
+              </a:spcBef>
+              <a:spcAft>
+                <a:spcPts val="100"/>
+              </a:spcAft>
+            </a:pPr>
+            <a:r>
+              <a:rPr lang="en-US" sz="1400" b="1" dirty="0">
+                <a:solidFill>
+                  <a:srgbClr val="00E5FF"/>
+                </a:solidFill>
+                <a:latin typeface="Consolas"/>
+              </a:rPr>
+              <a:t>Defender for Cloud</a:t>
+            </a:r>
+          </a:p>
+        </p:txBody>
+      </p:sp>
+      <p:sp>
+        <p:nvSpPr>
+          <p:cNvPr id="32" name="RightDesc0"/>
+          <p:cNvSpPr/>
+          <p:nvPr/>
+        </p:nvSpPr>
+        <p:spPr>
+          <a:xfrm>
+            <a:off x="6400800" y="1739900"/>
+            <a:ext cx="5308600" cy="635000"/>
+          </a:xfrm>
+          <a:prstGeom prst="rect">
+            <a:avLst/>
+          </a:prstGeom>
+          <a:noFill/>
+          <a:ln>
+            <a:noFill/>
+          </a:ln>
+        </p:spPr>
+        <p:txBody>
+          <a:bodyPr wrap="square" lIns="0" tIns="0" rIns="0" bIns="0" anchor="t"/>
+          <a:lstStyle/>
+          <a:p>
+            <a:pPr algn="l">
+              <a:spcBef>
+                <a:spcPts val="0"/>
+              </a:spcBef>
+              <a:spcAft>
+                <a:spcPts val="200"/>
+              </a:spcAft>
+            </a:pPr>
+            <a:r>
+              <a:rPr lang="en-US" sz="1400" b="0" dirty="0">
+                <a:solidFill>
+                  <a:srgbClr val="CCCCCC"/>
+                </a:solidFill>
+                <a:latin typeface="Segoe UI"/>
+              </a:rPr>
+              <a:t>AI security posture recommendations and runtime threat alerts directly in the Foundry dev environment. Proactive risk identification.</a:t>
+            </a:r>
+          </a:p>
+        </p:txBody>
+      </p:sp>
+      <p:sp>
+        <p:nvSpPr>
+          <p:cNvPr id="34" name="RightBar1"/>
+          <p:cNvSpPr/>
+          <p:nvPr/>
+        </p:nvSpPr>
+        <p:spPr>
+          <a:xfrm>
+            <a:off x="6223000" y="2451100"/>
+            <a:ext cx="50800" cy="914400"/>
+          </a:xfrm>
+          <a:prstGeom prst="rect">
+            <a:avLst/>
+          </a:prstGeom>
+          <a:solidFill>
+            <a:srgbClr val="00FF41"/>
+          </a:solidFill>
+          <a:ln>
+            <a:noFill/>
+          </a:ln>
+        </p:spPr>
+        <p:txBody>
+          <a:bodyPr wrap="square" lIns="0" tIns="0" rIns="0" bIns="0" anchor="t"/>
+          <a:lstStyle/>
+          <a:p>
+            <a:endParaRPr lang="en-US"/>
+          </a:p>
+        </p:txBody>
+      </p:sp>
+      <p:sp>
+        <p:nvSpPr>
+          <p:cNvPr id="35" name="RightTitle1"/>
+          <p:cNvSpPr/>
+          <p:nvPr/>
+        </p:nvSpPr>
+        <p:spPr>
+          <a:xfrm>
+            <a:off x="6400800" y="2451100"/>
+            <a:ext cx="5080000" cy="279400"/>
+          </a:xfrm>
+          <a:prstGeom prst="rect">
+            <a:avLst/>
+          </a:prstGeom>
+          <a:noFill/>
+          <a:ln>
+            <a:noFill/>
+          </a:ln>
+        </p:spPr>
+        <p:txBody>
+          <a:bodyPr wrap="square" lIns="0" tIns="0" rIns="0" bIns="0" anchor="t"/>
+          <a:lstStyle/>
+          <a:p>
+            <a:pPr algn="l">
+              <a:spcBef>
+                <a:spcPts val="0"/>
+              </a:spcBef>
+              <a:spcAft>
+                <a:spcPts val="100"/>
+              </a:spcAft>
+            </a:pPr>
+            <a:r>
+              <a:rPr lang="en-US" sz="1400" b="1" dirty="0">
+                <a:solidFill>
+                  <a:srgbClr val="00FF41"/>
+                </a:solidFill>
+                <a:latin typeface="Consolas"/>
+              </a:rPr>
+              <a:t>Red-Teaming Agent</a:t>
+            </a:r>
+          </a:p>
+        </p:txBody>
+      </p:sp>
+      <p:sp>
+        <p:nvSpPr>
+          <p:cNvPr id="36" name="RightDesc1"/>
+          <p:cNvSpPr/>
+          <p:nvPr/>
+        </p:nvSpPr>
+        <p:spPr>
+          <a:xfrm>
+            <a:off x="6400800" y="2730500"/>
+            <a:ext cx="5308600" cy="635000"/>
+          </a:xfrm>
+          <a:prstGeom prst="rect">
+            <a:avLst/>
+          </a:prstGeom>
+          <a:noFill/>
+          <a:ln>
+            <a:noFill/>
+          </a:ln>
+        </p:spPr>
+        <p:txBody>
+          <a:bodyPr wrap="square" lIns="0" tIns="0" rIns="0" bIns="0" anchor="t"/>
+          <a:lstStyle/>
+          <a:p>
+            <a:pPr algn="l">
+              <a:spcBef>
+                <a:spcPts val="0"/>
+              </a:spcBef>
+              <a:spcAft>
+                <a:spcPts val="200"/>
+              </a:spcAft>
+            </a:pPr>
+            <a:r>
+              <a:rPr lang="en-US" sz="1400" b="0" dirty="0">
+                <a:solidFill>
+                  <a:srgbClr val="CCCCCC"/>
+                </a:solidFill>
+                <a:latin typeface="Segoe UI"/>
+              </a:rPr>
+              <a:t>Automated adversarial probing to identify known risks at scale. Generates adversarial datasets for safety evaluation and shift-left testing.</a:t>
+            </a:r>
+          </a:p>
+        </p:txBody>
+      </p:sp>
+      <p:sp>
+        <p:nvSpPr>
+          <p:cNvPr id="38" name="RightBar2"/>
+          <p:cNvSpPr/>
+          <p:nvPr/>
+        </p:nvSpPr>
+        <p:spPr>
+          <a:xfrm>
+            <a:off x="6223000" y="3441700"/>
+            <a:ext cx="50800" cy="914400"/>
+          </a:xfrm>
+          <a:prstGeom prst="rect">
+            <a:avLst/>
+          </a:prstGeom>
+          <a:solidFill>
+            <a:srgbClr val="FFD700"/>
+          </a:solidFill>
+          <a:ln>
+            <a:noFill/>
+          </a:ln>
+        </p:spPr>
+        <p:txBody>
+          <a:bodyPr wrap="square" lIns="0" tIns="0" rIns="0" bIns="0" anchor="t"/>
+          <a:lstStyle/>
+          <a:p>
+            <a:endParaRPr lang="en-US"/>
+          </a:p>
+        </p:txBody>
+      </p:sp>
+      <p:sp>
+        <p:nvSpPr>
+          <p:cNvPr id="39" name="RightTitle2"/>
+          <p:cNvSpPr/>
+          <p:nvPr/>
+        </p:nvSpPr>
+        <p:spPr>
+          <a:xfrm>
+            <a:off x="6400800" y="3441700"/>
+            <a:ext cx="5080000" cy="279400"/>
+          </a:xfrm>
+          <a:prstGeom prst="rect">
+            <a:avLst/>
+          </a:prstGeom>
+          <a:noFill/>
+          <a:ln>
+            <a:noFill/>
+          </a:ln>
+        </p:spPr>
+        <p:txBody>
+          <a:bodyPr wrap="square" lIns="0" tIns="0" rIns="0" bIns="0" anchor="t"/>
+          <a:lstStyle/>
+          <a:p>
+            <a:pPr algn="l">
+              <a:spcBef>
+                <a:spcPts val="0"/>
+              </a:spcBef>
+              <a:spcAft>
+                <a:spcPts val="100"/>
+              </a:spcAft>
+            </a:pPr>
+            <a:r>
+              <a:rPr lang="en-US" sz="1400" b="1" dirty="0">
+                <a:solidFill>
+                  <a:srgbClr val="FFD700"/>
+                </a:solidFill>
+                <a:latin typeface="Consolas"/>
+              </a:rPr>
+              <a:t>Observability Pipeline</a:t>
+            </a:r>
+          </a:p>
+        </p:txBody>
+      </p:sp>
+      <p:sp>
+        <p:nvSpPr>
+          <p:cNvPr id="40" name="RightDesc2"/>
+          <p:cNvSpPr/>
+          <p:nvPr/>
+        </p:nvSpPr>
+        <p:spPr>
+          <a:xfrm>
+            <a:off x="6400800" y="3721100"/>
+            <a:ext cx="5308600" cy="635000"/>
+          </a:xfrm>
+          <a:prstGeom prst="rect">
+            <a:avLst/>
+          </a:prstGeom>
+          <a:noFill/>
+          <a:ln>
+            <a:noFill/>
+          </a:ln>
+        </p:spPr>
+        <p:txBody>
+          <a:bodyPr wrap="square" lIns="0" tIns="0" rIns="0" bIns="0" anchor="t"/>
+          <a:lstStyle/>
+          <a:p>
+            <a:pPr algn="l">
+              <a:spcBef>
+                <a:spcPts val="0"/>
+              </a:spcBef>
+              <a:spcAft>
+                <a:spcPts val="200"/>
+              </a:spcAft>
+            </a:pPr>
+            <a:r>
+              <a:rPr lang="en-US" sz="1400" b="0" dirty="0">
+                <a:solidFill>
+                  <a:srgbClr val="CCCCCC"/>
+                </a:solidFill>
+                <a:latin typeface="Segoe UI"/>
+              </a:rPr>
+              <a:t>Log prompts, trace tool invocations, track token usage, capture safety classifier scores. Export to Azure Monitor and SIEM systems.</a:t>
+            </a:r>
+          </a:p>
+        </p:txBody>
+      </p:sp>
+      <p:sp>
+        <p:nvSpPr>
+          <p:cNvPr id="42" name="RightBar3"/>
+          <p:cNvSpPr/>
+          <p:nvPr/>
+        </p:nvSpPr>
+        <p:spPr>
+          <a:xfrm>
+            <a:off x="6223000" y="4432300"/>
+            <a:ext cx="50800" cy="914400"/>
+          </a:xfrm>
+          <a:prstGeom prst="rect">
+            <a:avLst/>
+          </a:prstGeom>
+          <a:solidFill>
+            <a:srgbClr val="FF0044"/>
+          </a:solidFill>
+          <a:ln>
+            <a:noFill/>
+          </a:ln>
+        </p:spPr>
+        <p:txBody>
+          <a:bodyPr wrap="square" lIns="0" tIns="0" rIns="0" bIns="0" anchor="t"/>
+          <a:lstStyle/>
+          <a:p>
+            <a:endParaRPr lang="en-US"/>
+          </a:p>
+        </p:txBody>
+      </p:sp>
+      <p:sp>
+        <p:nvSpPr>
+          <p:cNvPr id="43" name="RightTitle3"/>
+          <p:cNvSpPr/>
+          <p:nvPr/>
+        </p:nvSpPr>
+        <p:spPr>
+          <a:xfrm>
+            <a:off x="6400800" y="4432300"/>
+            <a:ext cx="5080000" cy="279400"/>
+          </a:xfrm>
+          <a:prstGeom prst="rect">
+            <a:avLst/>
+          </a:prstGeom>
+          <a:noFill/>
+          <a:ln>
+            <a:noFill/>
+          </a:ln>
+        </p:spPr>
+        <p:txBody>
+          <a:bodyPr wrap="square" lIns="0" tIns="0" rIns="0" bIns="0" anchor="t"/>
+          <a:lstStyle/>
+          <a:p>
+            <a:pPr algn="l">
+              <a:spcBef>
+                <a:spcPts val="0"/>
+              </a:spcBef>
+              <a:spcAft>
+                <a:spcPts val="100"/>
+              </a:spcAft>
+            </a:pPr>
+            <a:r>
+              <a:rPr lang="en-US" sz="1400" b="1" dirty="0">
+                <a:solidFill>
+                  <a:srgbClr val="FF0044"/>
+                </a:solidFill>
+                <a:latin typeface="Consolas"/>
+              </a:rPr>
+              <a:t>Risk &amp; Safety Evaluations</a:t>
+            </a:r>
+          </a:p>
+        </p:txBody>
+      </p:sp>
+      <p:sp>
+        <p:nvSpPr>
+          <p:cNvPr id="44" name="RightDesc3"/>
+          <p:cNvSpPr/>
+          <p:nvPr/>
+        </p:nvSpPr>
+        <p:spPr>
+          <a:xfrm>
+            <a:off x="6400800" y="4711700"/>
+            <a:ext cx="5308600" cy="635000"/>
+          </a:xfrm>
+          <a:prstGeom prst="rect">
+            <a:avLst/>
+          </a:prstGeom>
+          <a:noFill/>
+          <a:ln>
+            <a:noFill/>
+          </a:ln>
+        </p:spPr>
+        <p:txBody>
+          <a:bodyPr wrap="square" lIns="0" tIns="0" rIns="0" bIns="0" anchor="t"/>
+          <a:lstStyle/>
+          <a:p>
+            <a:pPr algn="l">
+              <a:spcBef>
+                <a:spcPts val="0"/>
+              </a:spcBef>
+              <a:spcAft>
+                <a:spcPts val="200"/>
+              </a:spcAft>
+            </a:pPr>
+            <a:r>
+              <a:rPr lang="en-US" sz="1400" b="0" dirty="0">
+                <a:solidFill>
+                  <a:srgbClr val="CCCCCC"/>
+                </a:solidFill>
+                <a:latin typeface="Segoe UI"/>
+              </a:rPr>
+              <a:t>Evaluate app outputs for content risks, jailbreak vulnerabilities, and grounding quality before production deployment.</a:t>
+            </a:r>
+          </a:p>
+        </p:txBody>
+      </p:sp>
+      <p:sp>
+        <p:nvSpPr>
+          <p:cNvPr id="50" name="BottomDivider"/>
+          <p:cNvSpPr/>
+          <p:nvPr/>
+        </p:nvSpPr>
+        <p:spPr>
+          <a:xfrm>
+            <a:off x="457200" y="5588000"/>
+            <a:ext cx="11277600" cy="25400"/>
+          </a:xfrm>
+          <a:prstGeom prst="rect">
+            <a:avLst/>
+          </a:prstGeom>
+          <a:solidFill>
+            <a:srgbClr val="BB86FC"/>
+          </a:solidFill>
+          <a:ln>
+            <a:noFill/>
+          </a:ln>
+        </p:spPr>
+        <p:txBody>
+          <a:bodyPr wrap="square" lIns="0" tIns="0" rIns="0" bIns="0" anchor="t"/>
+          <a:lstStyle/>
+          <a:p>
+            <a:endParaRPr lang="en-US"/>
+          </a:p>
+        </p:txBody>
+      </p:sp>
+      <p:sp>
+        <p:nvSpPr>
+          <p:cNvPr id="51" name="BottomNote"/>
+          <p:cNvSpPr/>
+          <p:nvPr/>
+        </p:nvSpPr>
+        <p:spPr>
+          <a:xfrm>
+            <a:off x="635000" y="5715000"/>
+            <a:ext cx="10972800" cy="635000"/>
+          </a:xfrm>
+          <a:prstGeom prst="rect">
+            <a:avLst/>
+          </a:prstGeom>
+          <a:noFill/>
+          <a:ln>
+            <a:noFill/>
+          </a:ln>
+        </p:spPr>
+        <p:txBody>
+          <a:bodyPr wrap="square" lIns="0" tIns="0" rIns="0" bIns="0" anchor="t"/>
+          <a:lstStyle/>
+          <a:p>
+            <a:pPr algn="ctr">
+              <a:spcBef>
+                <a:spcPts val="0"/>
+              </a:spcBef>
+              <a:spcAft>
+                <a:spcPts val="200"/>
+              </a:spcAft>
+            </a:pPr>
+            <a:r>
+              <a:rPr lang="en-US" sz="1400" b="0" dirty="0">
+                <a:solidFill>
+                  <a:srgbClr val="888888"/>
+                </a:solidFill>
+                <a:latin typeface="Consolas"/>
+              </a:rPr>
+              <a:t>"Azure services do not assume that things running on Azure are safe" — Zero Trust by default</a:t>
+            </a:r>
+          </a:p>
+        </p:txBody>
+      </p:sp>
+      <p:sp>
+        <p:nvSpPr>
+          <p:cNvPr id="60" name="Footer"/>
+          <p:cNvSpPr/>
+          <p:nvPr/>
+        </p:nvSpPr>
+        <p:spPr>
+          <a:xfrm>
+            <a:off x="457200" y="6400800"/>
+            <a:ext cx="4572000" cy="368300"/>
+          </a:xfrm>
+          <a:prstGeom prst="rect">
+            <a:avLst/>
+          </a:prstGeom>
+          <a:noFill/>
+          <a:ln>
+            <a:noFill/>
+          </a:ln>
+        </p:spPr>
+        <p:txBody>
+          <a:bodyPr wrap="square" lIns="0" tIns="0" rIns="0" bIns="0" anchor="t"/>
+          <a:lstStyle/>
+          <a:p>
+            <a:pPr algn="l">
+              <a:spcBef>
+                <a:spcPts val="0"/>
+              </a:spcBef>
+              <a:spcAft>
+                <a:spcPts val="600"/>
+              </a:spcAft>
+            </a:pPr>
+            <a:r>
+              <a:rPr lang="en-US" sz="1000" b="0" dirty="0">
+                <a:solidFill>
+                  <a:srgbClr val="888888"/>
+                </a:solidFill>
+                <a:latin typeface="Consolas"/>
+              </a:rPr>
+              <a:t>HACKING AND SECURING LLMs</a:t>
+            </a:r>
+          </a:p>
+        </p:txBody>
+      </p:sp>
+      <p:sp>
+        <p:nvSpPr>
+          <p:cNvPr id="61" name="SlideNum"/>
+          <p:cNvSpPr/>
+          <p:nvPr/>
+        </p:nvSpPr>
+        <p:spPr>
+          <a:xfrm>
+            <a:off x="10515600" y="6400800"/>
+            <a:ext cx="1371600" cy="368300"/>
+          </a:xfrm>
+          <a:prstGeom prst="rect">
+            <a:avLst/>
+          </a:prstGeom>
+          <a:noFill/>
+          <a:ln>
+            <a:noFill/>
+          </a:ln>
+        </p:spPr>
+        <p:txBody>
+          <a:bodyPr wrap="square" lIns="0" tIns="0" rIns="0" bIns="0" anchor="t"/>
+          <a:lstStyle/>
+          <a:p>
+            <a:pPr algn="r">
+              <a:spcBef>
+                <a:spcPts val="0"/>
+              </a:spcBef>
+              <a:spcAft>
+                <a:spcPts val="600"/>
+              </a:spcAft>
+            </a:pPr>
+            <a:r>
+              <a:rPr lang="en-US" sz="1100" b="0" dirty="0">
+                <a:solidFill>
+                  <a:srgbClr val="888888"/>
+                </a:solidFill>
+                <a:latin typeface="Consolas"/>
+              </a:rPr>
+              <a:t>13 / 14</a:t>
+            </a:r>
+          </a:p>
+        </p:txBody>
+      </p:sp>
+    </p:spTree>
+    <p:extLst>
+      <p:ext uri="{BB962C8B-B14F-4D97-AF65-F5344CB8AC3E}">
+        <p14:creationId xmlns:p14="http://schemas.microsoft.com/office/powerpoint/2010/main" val="2999135301"/>
+      </p:ext>
+    </p:extLst>
+  </p:cSld>
+  <p:clrMapOvr>
+    <a:masterClrMapping/>
+  </p:clrMapOvr>
+</p:sld>
+</file>
+
+<file path=ppt/slides/slide14.xml><?xml version="1.0" encoding="utf-8"?>
 <p:sld xmlns:a="http://schemas.openxmlformats.org/drawingml/2006/main" xmlns:r="http://schemas.openxmlformats.org/officeDocument/2006/relationships" xmlns:p="http://schemas.openxmlformats.org/presentationml/2006/main">
   <p:cSld>
     <p:bg>
@@ -6602,7 +8814,7 @@
         <p:spPr>
           <a:xfrm>
             <a:off x="10515600" y="6400800"/>
-            <a:ext cx="1371600" cy="365760"/>
+            <a:ext cx="1371600" cy="261610"/>
           </a:xfrm>
           <a:prstGeom prst="rect">
             <a:avLst/>
@@ -6622,20 +8834,25 @@
               <a:spcAft>
                 <a:spcPts val="600"/>
               </a:spcAft>
-              <a:defRPr sz="1100" b="0">
+            </a:pPr>
+            <a:r>
+              <a:rPr lang="en-US" sz="1100" b="0" dirty="0">
                 <a:solidFill>
                   <a:srgbClr val="888888"/>
                 </a:solidFill>
                 <a:latin typeface="Consolas"/>
-              </a:defRPr>
-            </a:pPr>
-            <a:r>
-              <a:t>12 / 12</a:t>
+              </a:rPr>
+              <a:t>14 / 14</a:t>
             </a:r>
           </a:p>
         </p:txBody>
       </p:sp>
     </p:spTree>
+    <p:extLst>
+      <p:ext uri="{BB962C8B-B14F-4D97-AF65-F5344CB8AC3E}">
+        <p14:creationId xmlns:p14="http://schemas.microsoft.com/office/powerpoint/2010/main" val="721901450"/>
+      </p:ext>
+    </p:extLst>
   </p:cSld>
   <p:clrMapOvr>
     <a:masterClrMapping/>
